--- a/output/wordlabs-print-3day.pptx
+++ b/output/wordlabs-print-3day.pptx
@@ -4240,7 +4240,7 @@
                 <a:ea typeface="Calibri" pitchFamily="34" charset="-122"/>
                 <a:cs typeface="Calibri" pitchFamily="34" charset="-120"/>
               </a:rPr>
-              <a:t>"to press marks onto surface"</a:t>
+              <a:t>"mark made by pressing"</a:t>
             </a:r>
             <a:endParaRPr lang="en-US" sz="2200" dirty="0"/>
           </a:p>
@@ -5288,7 +5288,7 @@
                 <a:ea typeface="Calibri" pitchFamily="34" charset="-122"/>
                 <a:cs typeface="Calibri" pitchFamily="34" charset="-120"/>
               </a:rPr>
-              <a:t>Word Labs  •  wordlabs.app  •  Root: 'print' = to press marks onto surface</a:t>
+              <a:t>Word Labs  •  wordlabs.app  •  Root: 'print' = mark made by pressing</a:t>
             </a:r>
             <a:endParaRPr lang="en-US" sz="800" dirty="0"/>
           </a:p>
@@ -5928,7 +5928,7 @@
                 <a:ea typeface="Calibri" pitchFamily="34" charset="-122"/>
                 <a:cs typeface="Calibri" pitchFamily="34" charset="-120"/>
               </a:rPr>
-              <a:t>Word Labs  •  wordlabs.app  •  Root: 'print' = to press marks onto surface</a:t>
+              <a:t>Word Labs  •  wordlabs.app  •  Root: 'print' = mark made by pressing</a:t>
             </a:r>
             <a:endParaRPr lang="en-US" sz="800" dirty="0"/>
           </a:p>
@@ -6040,7 +6040,7 @@
                 <a:ea typeface="Calibri" pitchFamily="34" charset="-122"/>
                 <a:cs typeface="Calibri" pitchFamily="34" charset="-120"/>
               </a:rPr>
-              <a:t>The detective carefully dusted for a </a:t>
+              <a:t>The police officer carefully examined the </a:t>
             </a:r>
             <a:pPr algn="l" indent="0" marL="0">
               <a:buNone/>
@@ -6071,7 +6071,7 @@
                 <a:ea typeface="Calibri" pitchFamily="34" charset="-122"/>
                 <a:cs typeface="Calibri" pitchFamily="34" charset="-120"/>
               </a:rPr>
-              <a:t>, then asked the officer to </a:t>
+              <a:t> on the glass, then ordered a </a:t>
             </a:r>
             <a:pPr algn="l" indent="0" marL="0">
               <a:buNone/>
@@ -6102,7 +6102,7 @@
                 <a:ea typeface="Calibri" pitchFamily="34" charset="-122"/>
                 <a:cs typeface="Calibri" pitchFamily="34" charset="-120"/>
               </a:rPr>
-              <a:t> the evidence report.</a:t>
+              <a:t> of the report.</a:t>
             </a:r>
             <a:endParaRPr lang="en-US" sz="1800" dirty="0"/>
           </a:p>
@@ -6716,7 +6716,7 @@
                 <a:ea typeface="Calibri" pitchFamily="34" charset="-122"/>
                 <a:cs typeface="Calibri" pitchFamily="34" charset="-120"/>
               </a:rPr>
-              <a:t>Word Labs  •  wordlabs.app  •  Root: 'print' = to press marks onto surface</a:t>
+              <a:t>Word Labs  •  wordlabs.app  •  Root: 'print' = mark made by pressing</a:t>
             </a:r>
             <a:endParaRPr lang="en-US" sz="800" dirty="0"/>
           </a:p>
@@ -7543,7 +7543,7 @@
                 <a:ea typeface="Calibri" pitchFamily="34" charset="-122"/>
                 <a:cs typeface="Calibri" pitchFamily="34" charset="-120"/>
               </a:rPr>
-              <a:t>Word Labs  •  wordlabs.app  •  Root: 'print' = to press marks onto surface</a:t>
+              <a:t>Word Labs  •  wordlabs.app  •  Root: 'print' = mark made by pressing</a:t>
             </a:r>
             <a:endParaRPr lang="en-US" sz="800" dirty="0"/>
           </a:p>
@@ -7972,7 +7972,7 @@
                 <a:ea typeface="Calibri" pitchFamily="34" charset="-122"/>
                 <a:cs typeface="Calibri" pitchFamily="34" charset="-120"/>
               </a:rPr>
-              <a:t>to press a mark onto a surface</a:t>
+              <a:t>mark made by pressing</a:t>
             </a:r>
             <a:endParaRPr lang="en-US" sz="850" dirty="0"/>
           </a:p>
@@ -8528,7 +8528,7 @@
                 <a:ea typeface="Calibri" pitchFamily="34" charset="-122"/>
                 <a:cs typeface="Calibri" pitchFamily="34" charset="-120"/>
               </a:rPr>
-              <a:t>Word Labs  •  wordlabs.app  •  Root: 'print' = to press marks onto surface</a:t>
+              <a:t>Word Labs  •  wordlabs.app  •  Root: 'print' = mark made by pressing</a:t>
             </a:r>
             <a:endParaRPr lang="en-US" sz="800" dirty="0"/>
           </a:p>
@@ -8957,7 +8957,7 @@
                 <a:ea typeface="Calibri" pitchFamily="34" charset="-122"/>
                 <a:cs typeface="Calibri" pitchFamily="34" charset="-120"/>
               </a:rPr>
-              <a:t>to press a mark onto a surface</a:t>
+              <a:t>mark made by pressing</a:t>
             </a:r>
             <a:endParaRPr lang="en-US" sz="850" dirty="0"/>
           </a:p>
@@ -9750,7 +9750,7 @@
                 <a:ea typeface="Calibri" pitchFamily="34" charset="-122"/>
                 <a:cs typeface="Calibri" pitchFamily="34" charset="-120"/>
               </a:rPr>
-              <a:t>Word Labs  •  wordlabs.app  •  Root: 'print' = to press marks onto surface</a:t>
+              <a:t>Word Labs  •  wordlabs.app  •  Root: 'print' = mark made by pressing</a:t>
             </a:r>
             <a:endParaRPr lang="en-US" sz="800" dirty="0"/>
           </a:p>
@@ -10179,7 +10179,7 @@
                 <a:ea typeface="Calibri" pitchFamily="34" charset="-122"/>
                 <a:cs typeface="Calibri" pitchFamily="34" charset="-120"/>
               </a:rPr>
-              <a:t>to press a mark onto a surface</a:t>
+              <a:t>mark made by pressing</a:t>
             </a:r>
             <a:endParaRPr lang="en-US" sz="850" dirty="0"/>
           </a:p>
@@ -11527,7 +11527,7 @@
                 <a:ea typeface="Calibri" pitchFamily="34" charset="-122"/>
                 <a:cs typeface="Calibri" pitchFamily="34" charset="-120"/>
               </a:rPr>
-              <a:t>Word Labs  •  wordlabs.app  •  Root: 'print' = to press marks onto surface</a:t>
+              <a:t>Word Labs  •  wordlabs.app  •  Root: 'print' = mark made by pressing</a:t>
             </a:r>
             <a:endParaRPr lang="en-US" sz="800" dirty="0"/>
           </a:p>
@@ -12354,7 +12354,7 @@
                 <a:ea typeface="Calibri" pitchFamily="34" charset="-122"/>
                 <a:cs typeface="Calibri" pitchFamily="34" charset="-120"/>
               </a:rPr>
-              <a:t>Word Labs  •  wordlabs.app  •  Root: 'print' = to press marks onto surface</a:t>
+              <a:t>Word Labs  •  wordlabs.app  •  Root: 'print' = mark made by pressing</a:t>
             </a:r>
             <a:endParaRPr lang="en-US" sz="800" dirty="0"/>
           </a:p>
@@ -12783,7 +12783,7 @@
                 <a:ea typeface="Calibri" pitchFamily="34" charset="-122"/>
                 <a:cs typeface="Calibri" pitchFamily="34" charset="-120"/>
               </a:rPr>
-              <a:t>to press a mark onto a surface</a:t>
+              <a:t>mark made by pressing</a:t>
             </a:r>
             <a:endParaRPr lang="en-US" sz="850" dirty="0"/>
           </a:p>
@@ -13339,7 +13339,7 @@
                 <a:ea typeface="Calibri" pitchFamily="34" charset="-122"/>
                 <a:cs typeface="Calibri" pitchFamily="34" charset="-120"/>
               </a:rPr>
-              <a:t>Word Labs  •  wordlabs.app  •  Root: 'print' = to press marks onto surface</a:t>
+              <a:t>Word Labs  •  wordlabs.app  •  Root: 'print' = mark made by pressing</a:t>
             </a:r>
             <a:endParaRPr lang="en-US" sz="800" dirty="0"/>
           </a:p>
@@ -13768,7 +13768,7 @@
                 <a:ea typeface="Calibri" pitchFamily="34" charset="-122"/>
                 <a:cs typeface="Calibri" pitchFamily="34" charset="-120"/>
               </a:rPr>
-              <a:t>to press a mark onto a surface</a:t>
+              <a:t>mark made by pressing</a:t>
             </a:r>
             <a:endParaRPr lang="en-US" sz="850" dirty="0"/>
           </a:p>
@@ -14365,7 +14365,7 @@
                 <a:ea typeface="Calibri" pitchFamily="34" charset="-122"/>
                 <a:cs typeface="Calibri" pitchFamily="34" charset="-120"/>
               </a:rPr>
-              <a:t>Root 'print' — to press marks onto surface</a:t>
+              <a:t>Root 'print' — mark made by pressing</a:t>
             </a:r>
             <a:endParaRPr lang="en-US" sz="1600" dirty="0"/>
           </a:p>
@@ -14721,7 +14721,7 @@
                 <a:ea typeface="Calibri" pitchFamily="34" charset="-122"/>
                 <a:cs typeface="Calibri" pitchFamily="34" charset="-120"/>
               </a:rPr>
-              <a:t>Word Labs  •  wordlabs.app  •  Root: 'print' = to press marks onto surface</a:t>
+              <a:t>Word Labs  •  wordlabs.app  •  Root: 'print' = mark made by pressing</a:t>
             </a:r>
             <a:endParaRPr lang="en-US" sz="800" dirty="0"/>
           </a:p>
@@ -15150,7 +15150,7 @@
                 <a:ea typeface="Calibri" pitchFamily="34" charset="-122"/>
                 <a:cs typeface="Calibri" pitchFamily="34" charset="-120"/>
               </a:rPr>
-              <a:t>to press a mark onto a surface</a:t>
+              <a:t>mark made by pressing</a:t>
             </a:r>
             <a:endParaRPr lang="en-US" sz="850" dirty="0"/>
           </a:p>
@@ -16543,7 +16543,7 @@
                 <a:ea typeface="Calibri" pitchFamily="34" charset="-122"/>
                 <a:cs typeface="Calibri" pitchFamily="34" charset="-120"/>
               </a:rPr>
-              <a:t>Word Labs  •  wordlabs.app  •  Root: 'print' = to press marks onto surface</a:t>
+              <a:t>Word Labs  •  wordlabs.app  •  Root: 'print' = mark made by pressing</a:t>
             </a:r>
             <a:endParaRPr lang="en-US" sz="800" dirty="0"/>
           </a:p>
@@ -16877,7 +16877,7 @@
                 <a:ea typeface="Trebuchet MS" pitchFamily="34" charset="-122"/>
                 <a:cs typeface="Trebuchet MS" pitchFamily="34" charset="-120"/>
               </a:rPr>
-              <a:t>1</a:t>
+              <a:t>2</a:t>
             </a:r>
             <a:pPr algn="ctr" indent="0" marL="0">
               <a:buNone/>
@@ -16891,7 +16891,7 @@
                 <a:ea typeface="Trebuchet MS" pitchFamily="34" charset="-122"/>
                 <a:cs typeface="Trebuchet MS" pitchFamily="34" charset="-120"/>
               </a:rPr>
-              <a:t>  punctuation mark</a:t>
+              <a:t>  punctuation marks</a:t>
             </a:r>
             <a:endParaRPr lang="en-US" sz="2800" dirty="0"/>
           </a:p>
@@ -17183,7 +17183,7 @@
                 <a:ea typeface="Calibri" pitchFamily="34" charset="-122"/>
                 <a:cs typeface="Calibri" pitchFamily="34" charset="-120"/>
               </a:rPr>
-              <a:t>Word Labs  •  wordlabs.app  •  Root: 'print' = to press marks onto surface</a:t>
+              <a:t>Word Labs  •  wordlabs.app  •  Root: 'print' = mark made by pressing</a:t>
             </a:r>
             <a:endParaRPr lang="en-US" sz="800" dirty="0"/>
           </a:p>
@@ -17295,7 +17295,7 @@
                 <a:ea typeface="Calibri" pitchFamily="34" charset="-122"/>
                 <a:cs typeface="Calibri" pitchFamily="34" charset="-120"/>
               </a:rPr>
-              <a:t>After finding a </a:t>
+              <a:t>The </a:t>
             </a:r>
             <a:pPr algn="l" indent="0" marL="0">
               <a:buNone/>
@@ -17312,7 +17312,7 @@
                 <a:ea typeface="Calibri" pitchFamily="34" charset="-122"/>
                 <a:cs typeface="Calibri" pitchFamily="34" charset="-120"/>
               </a:rPr>
-              <a:t>misprint</a:t>
+              <a:t>blueprint</a:t>
             </a:r>
             <a:pPr algn="l" indent="0" marL="0">
               <a:buNone/>
@@ -17326,7 +17326,7 @@
                 <a:ea typeface="Calibri" pitchFamily="34" charset="-122"/>
                 <a:cs typeface="Calibri" pitchFamily="34" charset="-120"/>
               </a:rPr>
-              <a:t> on the cover, the publisher decided to </a:t>
+              <a:t> showed the new </a:t>
             </a:r>
             <a:pPr algn="l" indent="0" marL="0">
               <a:buNone/>
@@ -17343,7 +17343,7 @@
                 <a:ea typeface="Calibri" pitchFamily="34" charset="-122"/>
                 <a:cs typeface="Calibri" pitchFamily="34" charset="-120"/>
               </a:rPr>
-              <a:t>reprint</a:t>
+              <a:t>printing</a:t>
             </a:r>
             <a:pPr algn="l" indent="0" marL="0">
               <a:buNone/>
@@ -17357,7 +17357,7 @@
                 <a:ea typeface="Calibri" pitchFamily="34" charset="-122"/>
                 <a:cs typeface="Calibri" pitchFamily="34" charset="-120"/>
               </a:rPr>
-              <a:t> the book and include a </a:t>
+              <a:t> room, but the architect spotted a </a:t>
             </a:r>
             <a:pPr algn="l" indent="0" marL="0">
               <a:buNone/>
@@ -17374,7 +17374,7 @@
                 <a:ea typeface="Calibri" pitchFamily="34" charset="-122"/>
                 <a:cs typeface="Calibri" pitchFamily="34" charset="-120"/>
               </a:rPr>
-              <a:t>blueprint</a:t>
+              <a:t>misprint</a:t>
             </a:r>
             <a:pPr algn="l" indent="0" marL="0">
               <a:buNone/>
@@ -17388,7 +17388,7 @@
                 <a:ea typeface="Calibri" pitchFamily="34" charset="-122"/>
                 <a:cs typeface="Calibri" pitchFamily="34" charset="-120"/>
               </a:rPr>
-              <a:t> of the inventor's machine inside.</a:t>
+              <a:t> in the measurements!</a:t>
             </a:r>
             <a:endParaRPr lang="en-US" sz="1800" dirty="0"/>
           </a:p>
@@ -17543,7 +17543,7 @@
                 <a:ea typeface="Trebuchet MS" pitchFamily="34" charset="-122"/>
                 <a:cs typeface="Trebuchet MS" pitchFamily="34" charset="-120"/>
               </a:rPr>
-              <a:t>misprint</a:t>
+              <a:t>blueprint</a:t>
             </a:r>
             <a:endParaRPr lang="en-US" sz="1400" dirty="0"/>
           </a:p>
@@ -17671,7 +17671,7 @@
                 <a:ea typeface="Trebuchet MS" pitchFamily="34" charset="-122"/>
                 <a:cs typeface="Trebuchet MS" pitchFamily="34" charset="-120"/>
               </a:rPr>
-              <a:t>reprint</a:t>
+              <a:t>printing</a:t>
             </a:r>
             <a:endParaRPr lang="en-US" sz="1400" dirty="0"/>
           </a:p>
@@ -17799,7 +17799,7 @@
                 <a:ea typeface="Trebuchet MS" pitchFamily="34" charset="-122"/>
                 <a:cs typeface="Trebuchet MS" pitchFamily="34" charset="-120"/>
               </a:rPr>
-              <a:t>blueprint</a:t>
+              <a:t>misprint</a:t>
             </a:r>
             <a:endParaRPr lang="en-US" sz="1400" dirty="0"/>
           </a:p>
@@ -18130,7 +18130,7 @@
                 <a:ea typeface="Calibri" pitchFamily="34" charset="-122"/>
                 <a:cs typeface="Calibri" pitchFamily="34" charset="-120"/>
               </a:rPr>
-              <a:t>Word Labs  •  wordlabs.app  •  Root: 'print' = to press marks onto surface</a:t>
+              <a:t>Word Labs  •  wordlabs.app  •  Root: 'print' = mark made by pressing</a:t>
             </a:r>
             <a:endParaRPr lang="en-US" sz="800" dirty="0"/>
           </a:p>
@@ -18269,7 +18269,7 @@
                 <a:ea typeface="Trebuchet MS" pitchFamily="34" charset="-122"/>
                 <a:cs typeface="Trebuchet MS" pitchFamily="34" charset="-120"/>
               </a:rPr>
-              <a:t>misprint</a:t>
+              <a:t>blueprint</a:t>
             </a:r>
             <a:endParaRPr lang="en-US" sz="2800" dirty="0"/>
           </a:p>
@@ -18957,7 +18957,7 @@
                 <a:ea typeface="Calibri" pitchFamily="34" charset="-122"/>
                 <a:cs typeface="Calibri" pitchFamily="34" charset="-120"/>
               </a:rPr>
-              <a:t>Word Labs  •  wordlabs.app  •  Root: 'print' = to press marks onto surface</a:t>
+              <a:t>Word Labs  •  wordlabs.app  •  Root: 'print' = mark made by pressing</a:t>
             </a:r>
             <a:endParaRPr lang="en-US" sz="800" dirty="0"/>
           </a:p>
@@ -19096,7 +19096,7 @@
                 <a:ea typeface="Trebuchet MS" pitchFamily="34" charset="-122"/>
                 <a:cs typeface="Trebuchet MS" pitchFamily="34" charset="-120"/>
               </a:rPr>
-              <a:t>misprint</a:t>
+              <a:t>blueprint</a:t>
             </a:r>
             <a:endParaRPr lang="en-US" sz="2800" dirty="0"/>
           </a:p>
@@ -19235,7 +19235,7 @@
                 <a:ea typeface="Trebuchet MS" pitchFamily="34" charset="-122"/>
                 <a:cs typeface="Trebuchet MS" pitchFamily="34" charset="-120"/>
               </a:rPr>
-              <a:t>mis</a:t>
+              <a:t>blue</a:t>
             </a:r>
             <a:endParaRPr lang="en-US" sz="1300" dirty="0"/>
           </a:p>
@@ -19274,7 +19274,7 @@
                 <a:ea typeface="Calibri" pitchFamily="34" charset="-122"/>
                 <a:cs typeface="Calibri" pitchFamily="34" charset="-120"/>
               </a:rPr>
-              <a:t>wrongly or badly</a:t>
+              <a:t>the colour blue</a:t>
             </a:r>
             <a:endParaRPr lang="en-US" sz="850" dirty="0"/>
           </a:p>
@@ -19386,7 +19386,7 @@
                 <a:ea typeface="Calibri" pitchFamily="34" charset="-122"/>
                 <a:cs typeface="Calibri" pitchFamily="34" charset="-120"/>
               </a:rPr>
-              <a:t>to press a mark onto a surface</a:t>
+              <a:t>mark made by pressing</a:t>
             </a:r>
             <a:endParaRPr lang="en-US" sz="850" dirty="0"/>
           </a:p>
@@ -19942,7 +19942,7 @@
                 <a:ea typeface="Calibri" pitchFamily="34" charset="-122"/>
                 <a:cs typeface="Calibri" pitchFamily="34" charset="-120"/>
               </a:rPr>
-              <a:t>Word Labs  •  wordlabs.app  •  Root: 'print' = to press marks onto surface</a:t>
+              <a:t>Word Labs  •  wordlabs.app  •  Root: 'print' = mark made by pressing</a:t>
             </a:r>
             <a:endParaRPr lang="en-US" sz="800" dirty="0"/>
           </a:p>
@@ -20081,7 +20081,7 @@
                 <a:ea typeface="Trebuchet MS" pitchFamily="34" charset="-122"/>
                 <a:cs typeface="Trebuchet MS" pitchFamily="34" charset="-120"/>
               </a:rPr>
-              <a:t>misprint</a:t>
+              <a:t>blueprint</a:t>
             </a:r>
             <a:endParaRPr lang="en-US" sz="2800" dirty="0"/>
           </a:p>
@@ -20220,7 +20220,7 @@
                 <a:ea typeface="Trebuchet MS" pitchFamily="34" charset="-122"/>
                 <a:cs typeface="Trebuchet MS" pitchFamily="34" charset="-120"/>
               </a:rPr>
-              <a:t>mis</a:t>
+              <a:t>blue</a:t>
             </a:r>
             <a:endParaRPr lang="en-US" sz="1300" dirty="0"/>
           </a:p>
@@ -20259,7 +20259,7 @@
                 <a:ea typeface="Calibri" pitchFamily="34" charset="-122"/>
                 <a:cs typeface="Calibri" pitchFamily="34" charset="-120"/>
               </a:rPr>
-              <a:t>wrongly or badly</a:t>
+              <a:t>the colour blue</a:t>
             </a:r>
             <a:endParaRPr lang="en-US" sz="850" dirty="0"/>
           </a:p>
@@ -20371,7 +20371,7 @@
                 <a:ea typeface="Calibri" pitchFamily="34" charset="-122"/>
                 <a:cs typeface="Calibri" pitchFamily="34" charset="-120"/>
               </a:rPr>
-              <a:t>to press a mark onto a surface</a:t>
+              <a:t>mark made by pressing</a:t>
             </a:r>
             <a:endParaRPr lang="en-US" sz="850" dirty="0"/>
           </a:p>
@@ -20530,7 +20530,7 @@
                 <a:ea typeface="Trebuchet MS" pitchFamily="34" charset="-122"/>
                 <a:cs typeface="Trebuchet MS" pitchFamily="34" charset="-120"/>
               </a:rPr>
-              <a:t>mis</a:t>
+              <a:t>blue</a:t>
             </a:r>
             <a:endParaRPr lang="en-US" sz="1400" dirty="0"/>
           </a:p>
@@ -21059,7 +21059,7 @@
                 <a:ea typeface="Calibri" pitchFamily="34" charset="-122"/>
                 <a:cs typeface="Calibri" pitchFamily="34" charset="-120"/>
               </a:rPr>
-              <a:t>Word Labs  •  wordlabs.app  •  Root: 'print' = to press marks onto surface</a:t>
+              <a:t>Word Labs  •  wordlabs.app  •  Root: 'print' = mark made by pressing</a:t>
             </a:r>
             <a:endParaRPr lang="en-US" sz="800" dirty="0"/>
           </a:p>
@@ -21198,7 +21198,7 @@
                 <a:ea typeface="Trebuchet MS" pitchFamily="34" charset="-122"/>
                 <a:cs typeface="Trebuchet MS" pitchFamily="34" charset="-120"/>
               </a:rPr>
-              <a:t>misprint</a:t>
+              <a:t>blueprint</a:t>
             </a:r>
             <a:endParaRPr lang="en-US" sz="2800" dirty="0"/>
           </a:p>
@@ -21337,7 +21337,7 @@
                 <a:ea typeface="Trebuchet MS" pitchFamily="34" charset="-122"/>
                 <a:cs typeface="Trebuchet MS" pitchFamily="34" charset="-120"/>
               </a:rPr>
-              <a:t>mis</a:t>
+              <a:t>blue</a:t>
             </a:r>
             <a:endParaRPr lang="en-US" sz="1300" dirty="0"/>
           </a:p>
@@ -21376,7 +21376,7 @@
                 <a:ea typeface="Calibri" pitchFamily="34" charset="-122"/>
                 <a:cs typeface="Calibri" pitchFamily="34" charset="-120"/>
               </a:rPr>
-              <a:t>wrongly or badly</a:t>
+              <a:t>the colour blue</a:t>
             </a:r>
             <a:endParaRPr lang="en-US" sz="850" dirty="0"/>
           </a:p>
@@ -21488,7 +21488,7 @@
                 <a:ea typeface="Calibri" pitchFamily="34" charset="-122"/>
                 <a:cs typeface="Calibri" pitchFamily="34" charset="-120"/>
               </a:rPr>
-              <a:t>to press a mark onto a surface</a:t>
+              <a:t>mark made by pressing</a:t>
             </a:r>
             <a:endParaRPr lang="en-US" sz="850" dirty="0"/>
           </a:p>
@@ -21647,7 +21647,7 @@
                 <a:ea typeface="Trebuchet MS" pitchFamily="34" charset="-122"/>
                 <a:cs typeface="Trebuchet MS" pitchFamily="34" charset="-120"/>
               </a:rPr>
-              <a:t>mis</a:t>
+              <a:t>blue</a:t>
             </a:r>
             <a:endParaRPr lang="en-US" sz="1400" dirty="0"/>
           </a:p>
@@ -21859,7 +21859,7 @@
         </p:nvSpPr>
         <p:spPr>
           <a:xfrm>
-            <a:off x="2023872" y="4169664"/>
+            <a:off x="2124837" y="4169664"/>
             <a:ext cx="685800" cy="475488"/>
           </a:xfrm>
           <a:prstGeom prst="rect">
@@ -21886,7 +21886,7 @@
         </p:nvSpPr>
         <p:spPr>
           <a:xfrm>
-            <a:off x="2023872" y="4169664"/>
+            <a:off x="2124837" y="4169664"/>
             <a:ext cx="685800" cy="475488"/>
           </a:xfrm>
           <a:prstGeom prst="rect">
@@ -21911,7 +21911,7 @@
                 <a:ea typeface="Trebuchet MS" pitchFamily="34" charset="-122"/>
                 <a:cs typeface="Trebuchet MS" pitchFamily="34" charset="-120"/>
               </a:rPr>
-              <a:t>m</a:t>
+              <a:t>bl</a:t>
             </a:r>
             <a:endParaRPr lang="en-US" sz="900" dirty="0"/>
           </a:p>
@@ -21925,7 +21925,7 @@
         </p:nvSpPr>
         <p:spPr>
           <a:xfrm>
-            <a:off x="2831592" y="4169664"/>
+            <a:off x="3033522" y="4169664"/>
             <a:ext cx="685800" cy="475488"/>
           </a:xfrm>
           <a:prstGeom prst="rect">
@@ -21952,7 +21952,7 @@
         </p:nvSpPr>
         <p:spPr>
           <a:xfrm>
-            <a:off x="2831592" y="4169664"/>
+            <a:off x="3033522" y="4169664"/>
             <a:ext cx="685800" cy="475488"/>
           </a:xfrm>
           <a:prstGeom prst="rect">
@@ -21977,7 +21977,7 @@
                 <a:ea typeface="Trebuchet MS" pitchFamily="34" charset="-122"/>
                 <a:cs typeface="Trebuchet MS" pitchFamily="34" charset="-120"/>
               </a:rPr>
-              <a:t>i</a:t>
+              <a:t>ue</a:t>
             </a:r>
             <a:endParaRPr lang="en-US" sz="900" dirty="0"/>
           </a:p>
@@ -21991,7 +21991,7 @@
         </p:nvSpPr>
         <p:spPr>
           <a:xfrm>
-            <a:off x="3639312" y="4169664"/>
+            <a:off x="3942207" y="4169664"/>
             <a:ext cx="685800" cy="475488"/>
           </a:xfrm>
           <a:prstGeom prst="rect">
@@ -22018,7 +22018,7 @@
         </p:nvSpPr>
         <p:spPr>
           <a:xfrm>
-            <a:off x="3639312" y="4169664"/>
+            <a:off x="3942207" y="4169664"/>
             <a:ext cx="685800" cy="475488"/>
           </a:xfrm>
           <a:prstGeom prst="rect">
@@ -22043,7 +22043,7 @@
                 <a:ea typeface="Trebuchet MS" pitchFamily="34" charset="-122"/>
                 <a:cs typeface="Trebuchet MS" pitchFamily="34" charset="-120"/>
               </a:rPr>
-              <a:t>s</a:t>
+              <a:t>p</a:t>
             </a:r>
             <a:endParaRPr lang="en-US" sz="900" dirty="0"/>
           </a:p>
@@ -22057,7 +22057,7 @@
         </p:nvSpPr>
         <p:spPr>
           <a:xfrm>
-            <a:off x="4447032" y="4169664"/>
+            <a:off x="4850892" y="4169664"/>
             <a:ext cx="685800" cy="475488"/>
           </a:xfrm>
           <a:prstGeom prst="rect">
@@ -22084,7 +22084,7 @@
         </p:nvSpPr>
         <p:spPr>
           <a:xfrm>
-            <a:off x="4447032" y="4169664"/>
+            <a:off x="4850892" y="4169664"/>
             <a:ext cx="685800" cy="475488"/>
           </a:xfrm>
           <a:prstGeom prst="rect">
@@ -22109,7 +22109,7 @@
                 <a:ea typeface="Trebuchet MS" pitchFamily="34" charset="-122"/>
                 <a:cs typeface="Trebuchet MS" pitchFamily="34" charset="-120"/>
               </a:rPr>
-              <a:t>p</a:t>
+              <a:t>r</a:t>
             </a:r>
             <a:endParaRPr lang="en-US" sz="900" dirty="0"/>
           </a:p>
@@ -22123,7 +22123,7 @@
         </p:nvSpPr>
         <p:spPr>
           <a:xfrm>
-            <a:off x="5254752" y="4169664"/>
+            <a:off x="5759577" y="4169664"/>
             <a:ext cx="685800" cy="475488"/>
           </a:xfrm>
           <a:prstGeom prst="rect">
@@ -22150,7 +22150,7 @@
         </p:nvSpPr>
         <p:spPr>
           <a:xfrm>
-            <a:off x="5254752" y="4169664"/>
+            <a:off x="5759577" y="4169664"/>
             <a:ext cx="685800" cy="475488"/>
           </a:xfrm>
           <a:prstGeom prst="rect">
@@ -22175,7 +22175,7 @@
                 <a:ea typeface="Trebuchet MS" pitchFamily="34" charset="-122"/>
                 <a:cs typeface="Trebuchet MS" pitchFamily="34" charset="-120"/>
               </a:rPr>
-              <a:t>r</a:t>
+              <a:t>i</a:t>
             </a:r>
             <a:endParaRPr lang="en-US" sz="900" dirty="0"/>
           </a:p>
@@ -22189,7 +22189,7 @@
         </p:nvSpPr>
         <p:spPr>
           <a:xfrm>
-            <a:off x="6062472" y="4169664"/>
+            <a:off x="6668262" y="4169664"/>
             <a:ext cx="685800" cy="475488"/>
           </a:xfrm>
           <a:prstGeom prst="rect">
@@ -22216,7 +22216,7 @@
         </p:nvSpPr>
         <p:spPr>
           <a:xfrm>
-            <a:off x="6062472" y="4169664"/>
+            <a:off x="6668262" y="4169664"/>
             <a:ext cx="685800" cy="475488"/>
           </a:xfrm>
           <a:prstGeom prst="rect">
@@ -22241,7 +22241,7 @@
                 <a:ea typeface="Trebuchet MS" pitchFamily="34" charset="-122"/>
                 <a:cs typeface="Trebuchet MS" pitchFamily="34" charset="-120"/>
               </a:rPr>
-              <a:t>i</a:t>
+              <a:t>n</a:t>
             </a:r>
             <a:endParaRPr lang="en-US" sz="900" dirty="0"/>
           </a:p>
@@ -22255,7 +22255,7 @@
         </p:nvSpPr>
         <p:spPr>
           <a:xfrm>
-            <a:off x="6870192" y="4169664"/>
+            <a:off x="7576947" y="4169664"/>
             <a:ext cx="685800" cy="475488"/>
           </a:xfrm>
           <a:prstGeom prst="rect">
@@ -22282,73 +22282,7 @@
         </p:nvSpPr>
         <p:spPr>
           <a:xfrm>
-            <a:off x="6870192" y="4169664"/>
-            <a:ext cx="685800" cy="475488"/>
-          </a:xfrm>
-          <a:prstGeom prst="rect">
-            <a:avLst/>
-          </a:prstGeom>
-          <a:noFill/>
-          <a:ln/>
-        </p:spPr>
-        <p:txBody>
-          <a:bodyPr wrap="square" lIns="0" tIns="0" rIns="0" bIns="0" rtlCol="0" anchor="ctr"/>
-          <a:lstStyle/>
-          <a:p>
-            <a:pPr algn="ctr" indent="0" marL="0">
-              <a:buNone/>
-            </a:pPr>
-            <a:r>
-              <a:rPr lang="en-US" sz="900" b="1" dirty="0">
-                <a:solidFill>
-                  <a:srgbClr val="9D174D"/>
-                </a:solidFill>
-                <a:latin typeface="Trebuchet MS" pitchFamily="34" charset="0"/>
-                <a:ea typeface="Trebuchet MS" pitchFamily="34" charset="-122"/>
-                <a:cs typeface="Trebuchet MS" pitchFamily="34" charset="-120"/>
-              </a:rPr>
-              <a:t>n</a:t>
-            </a:r>
-            <a:endParaRPr lang="en-US" sz="900" dirty="0"/>
-          </a:p>
-        </p:txBody>
-      </p:sp>
-      <p:sp>
-        <p:nvSpPr>
-          <p:cNvPr id="47" name="Shape 45"/>
-          <p:cNvSpPr/>
-          <p:nvPr/>
-        </p:nvSpPr>
-        <p:spPr>
-          <a:xfrm>
-            <a:off x="7677912" y="4169664"/>
-            <a:ext cx="685800" cy="475488"/>
-          </a:xfrm>
-          <a:prstGeom prst="rect">
-            <a:avLst>
-              <a:gd name="adj" fmla="val 7692"/>
-            </a:avLst>
-          </a:prstGeom>
-          <a:solidFill>
-            <a:srgbClr val="FFFFFF"/>
-          </a:solidFill>
-          <a:ln w="12700">
-            <a:solidFill>
-              <a:srgbClr val="DB2777"/>
-            </a:solidFill>
-            <a:prstDash val="solid"/>
-          </a:ln>
-        </p:spPr>
-      </p:sp>
-      <p:sp>
-        <p:nvSpPr>
-          <p:cNvPr id="48" name="Text 46"/>
-          <p:cNvSpPr/>
-          <p:nvPr/>
-        </p:nvSpPr>
-        <p:spPr>
-          <a:xfrm>
-            <a:off x="7677912" y="4169664"/>
+            <a:off x="7576947" y="4169664"/>
             <a:ext cx="685800" cy="475488"/>
           </a:xfrm>
           <a:prstGeom prst="rect">
@@ -22665,7 +22599,7 @@
                 <a:ea typeface="Calibri" pitchFamily="34" charset="-122"/>
                 <a:cs typeface="Calibri" pitchFamily="34" charset="-120"/>
               </a:rPr>
-              <a:t>Word Labs  •  wordlabs.app  •  Root: 'print' = to press marks onto surface</a:t>
+              <a:t>Word Labs  •  wordlabs.app  •  Root: 'print' = mark made by pressing</a:t>
             </a:r>
             <a:endParaRPr lang="en-US" sz="800" dirty="0"/>
           </a:p>
@@ -22804,7 +22738,7 @@
                 <a:ea typeface="Trebuchet MS" pitchFamily="34" charset="-122"/>
                 <a:cs typeface="Trebuchet MS" pitchFamily="34" charset="-120"/>
               </a:rPr>
-              <a:t>reprint</a:t>
+              <a:t>printing</a:t>
             </a:r>
             <a:endParaRPr lang="en-US" sz="2800" dirty="0"/>
           </a:p>
@@ -23492,7 +23426,7 @@
                 <a:ea typeface="Calibri" pitchFamily="34" charset="-122"/>
                 <a:cs typeface="Calibri" pitchFamily="34" charset="-120"/>
               </a:rPr>
-              <a:t>Word Labs  •  wordlabs.app  •  Root: 'print' = to press marks onto surface</a:t>
+              <a:t>Word Labs  •  wordlabs.app  •  Root: 'print' = mark made by pressing</a:t>
             </a:r>
             <a:endParaRPr lang="en-US" sz="800" dirty="0"/>
           </a:p>
@@ -23631,7 +23565,7 @@
                 <a:ea typeface="Trebuchet MS" pitchFamily="34" charset="-122"/>
                 <a:cs typeface="Trebuchet MS" pitchFamily="34" charset="-120"/>
               </a:rPr>
-              <a:t>reprint</a:t>
+              <a:t>printing</a:t>
             </a:r>
             <a:endParaRPr lang="en-US" sz="2800" dirty="0"/>
           </a:p>
@@ -23720,11 +23654,11 @@
             </a:avLst>
           </a:prstGeom>
           <a:solidFill>
-            <a:srgbClr val="DDD6FE"/>
+            <a:srgbClr val="CCFBF1"/>
           </a:solidFill>
           <a:ln w="19050">
             <a:solidFill>
-              <a:srgbClr val="7C3AED"/>
+              <a:srgbClr val="0D9488"/>
             </a:solidFill>
             <a:prstDash val="solid"/>
           </a:ln>
@@ -23764,13 +23698,13 @@
             <a:r>
               <a:rPr lang="en-US" sz="1300" b="1" dirty="0">
                 <a:solidFill>
-                  <a:srgbClr val="4C1D95"/>
+                  <a:srgbClr val="0F766E"/>
                 </a:solidFill>
                 <a:latin typeface="Trebuchet MS" pitchFamily="34" charset="0"/>
                 <a:ea typeface="Trebuchet MS" pitchFamily="34" charset="-122"/>
                 <a:cs typeface="Trebuchet MS" pitchFamily="34" charset="-120"/>
               </a:rPr>
-              <a:t>re</a:t>
+              <a:t>print</a:t>
             </a:r>
             <a:endParaRPr lang="en-US" sz="1300" dirty="0"/>
           </a:p>
@@ -23809,7 +23743,7 @@
                 <a:ea typeface="Calibri" pitchFamily="34" charset="-122"/>
                 <a:cs typeface="Calibri" pitchFamily="34" charset="-120"/>
               </a:rPr>
-              <a:t>again</a:t>
+              <a:t>mark made by pressing</a:t>
             </a:r>
             <a:endParaRPr lang="en-US" sz="850" dirty="0"/>
           </a:p>
@@ -23832,11 +23766,11 @@
             </a:avLst>
           </a:prstGeom>
           <a:solidFill>
-            <a:srgbClr val="CCFBF1"/>
+            <a:srgbClr val="FCE7F3"/>
           </a:solidFill>
           <a:ln w="19050">
             <a:solidFill>
-              <a:srgbClr val="0D9488"/>
+              <a:srgbClr val="DB2777"/>
             </a:solidFill>
             <a:prstDash val="solid"/>
           </a:ln>
@@ -23876,13 +23810,13 @@
             <a:r>
               <a:rPr lang="en-US" sz="1300" b="1" dirty="0">
                 <a:solidFill>
-                  <a:srgbClr val="0F766E"/>
+                  <a:srgbClr val="9D174D"/>
                 </a:solidFill>
                 <a:latin typeface="Trebuchet MS" pitchFamily="34" charset="0"/>
                 <a:ea typeface="Trebuchet MS" pitchFamily="34" charset="-122"/>
                 <a:cs typeface="Trebuchet MS" pitchFamily="34" charset="-120"/>
               </a:rPr>
-              <a:t>print</a:t>
+              <a:t>ing</a:t>
             </a:r>
             <a:endParaRPr lang="en-US" sz="1300" dirty="0"/>
           </a:p>
@@ -23921,7 +23855,7 @@
                 <a:ea typeface="Calibri" pitchFamily="34" charset="-122"/>
                 <a:cs typeface="Calibri" pitchFamily="34" charset="-120"/>
               </a:rPr>
-              <a:t>to press a mark onto a surface</a:t>
+              <a:t>action happening now</a:t>
             </a:r>
             <a:endParaRPr lang="en-US" sz="850" dirty="0"/>
           </a:p>
@@ -24477,7 +24411,7 @@
                 <a:ea typeface="Calibri" pitchFamily="34" charset="-122"/>
                 <a:cs typeface="Calibri" pitchFamily="34" charset="-120"/>
               </a:rPr>
-              <a:t>Word Labs  •  wordlabs.app  •  Root: 'print' = to press marks onto surface</a:t>
+              <a:t>Word Labs  •  wordlabs.app  •  Root: 'print' = mark made by pressing</a:t>
             </a:r>
             <a:endParaRPr lang="en-US" sz="800" dirty="0"/>
           </a:p>
@@ -24550,7 +24484,7 @@
                 <a:ea typeface="Trebuchet MS" pitchFamily="34" charset="-122"/>
                 <a:cs typeface="Trebuchet MS" pitchFamily="34" charset="-120"/>
               </a:rPr>
-              <a:t>We are learning that the root 'print' means 'to press marks onto surface'.</a:t>
+              <a:t>We are learning that the root 'print' means 'mark made by pressing'.</a:t>
             </a:r>
             <a:endParaRPr lang="en-US" sz="2000" dirty="0"/>
           </a:p>
@@ -25196,7 +25130,7 @@
                 <a:ea typeface="Calibri" pitchFamily="34" charset="-122"/>
                 <a:cs typeface="Calibri" pitchFamily="34" charset="-120"/>
               </a:rPr>
-              <a:t>Word Labs  •  wordlabs.app  •  Root: 'print' = to press marks onto surface</a:t>
+              <a:t>Word Labs  •  wordlabs.app  •  Root: 'print' = mark made by pressing</a:t>
             </a:r>
             <a:endParaRPr lang="en-US" sz="800" dirty="0"/>
           </a:p>
@@ -25335,7 +25269,7 @@
                 <a:ea typeface="Trebuchet MS" pitchFamily="34" charset="-122"/>
                 <a:cs typeface="Trebuchet MS" pitchFamily="34" charset="-120"/>
               </a:rPr>
-              <a:t>reprint</a:t>
+              <a:t>printing</a:t>
             </a:r>
             <a:endParaRPr lang="en-US" sz="2800" dirty="0"/>
           </a:p>
@@ -25424,11 +25358,11 @@
             </a:avLst>
           </a:prstGeom>
           <a:solidFill>
-            <a:srgbClr val="DDD6FE"/>
+            <a:srgbClr val="CCFBF1"/>
           </a:solidFill>
           <a:ln w="19050">
             <a:solidFill>
-              <a:srgbClr val="7C3AED"/>
+              <a:srgbClr val="0D9488"/>
             </a:solidFill>
             <a:prstDash val="solid"/>
           </a:ln>
@@ -25468,13 +25402,13 @@
             <a:r>
               <a:rPr lang="en-US" sz="1300" b="1" dirty="0">
                 <a:solidFill>
-                  <a:srgbClr val="4C1D95"/>
+                  <a:srgbClr val="0F766E"/>
                 </a:solidFill>
                 <a:latin typeface="Trebuchet MS" pitchFamily="34" charset="0"/>
                 <a:ea typeface="Trebuchet MS" pitchFamily="34" charset="-122"/>
                 <a:cs typeface="Trebuchet MS" pitchFamily="34" charset="-120"/>
               </a:rPr>
-              <a:t>re</a:t>
+              <a:t>print</a:t>
             </a:r>
             <a:endParaRPr lang="en-US" sz="1300" dirty="0"/>
           </a:p>
@@ -25513,7 +25447,7 @@
                 <a:ea typeface="Calibri" pitchFamily="34" charset="-122"/>
                 <a:cs typeface="Calibri" pitchFamily="34" charset="-120"/>
               </a:rPr>
-              <a:t>again</a:t>
+              <a:t>mark made by pressing</a:t>
             </a:r>
             <a:endParaRPr lang="en-US" sz="850" dirty="0"/>
           </a:p>
@@ -25536,11 +25470,11 @@
             </a:avLst>
           </a:prstGeom>
           <a:solidFill>
-            <a:srgbClr val="CCFBF1"/>
+            <a:srgbClr val="FCE7F3"/>
           </a:solidFill>
           <a:ln w="19050">
             <a:solidFill>
-              <a:srgbClr val="0D9488"/>
+              <a:srgbClr val="DB2777"/>
             </a:solidFill>
             <a:prstDash val="solid"/>
           </a:ln>
@@ -25580,13 +25514,13 @@
             <a:r>
               <a:rPr lang="en-US" sz="1300" b="1" dirty="0">
                 <a:solidFill>
-                  <a:srgbClr val="0F766E"/>
+                  <a:srgbClr val="9D174D"/>
                 </a:solidFill>
                 <a:latin typeface="Trebuchet MS" pitchFamily="34" charset="0"/>
                 <a:ea typeface="Trebuchet MS" pitchFamily="34" charset="-122"/>
                 <a:cs typeface="Trebuchet MS" pitchFamily="34" charset="-120"/>
               </a:rPr>
-              <a:t>print</a:t>
+              <a:t>ing</a:t>
             </a:r>
             <a:endParaRPr lang="en-US" sz="1300" dirty="0"/>
           </a:p>
@@ -25625,7 +25559,7 @@
                 <a:ea typeface="Calibri" pitchFamily="34" charset="-122"/>
                 <a:cs typeface="Calibri" pitchFamily="34" charset="-120"/>
               </a:rPr>
-              <a:t>to press a mark onto a surface</a:t>
+              <a:t>action happening now</a:t>
             </a:r>
             <a:endParaRPr lang="en-US" sz="850" dirty="0"/>
           </a:p>
@@ -25784,7 +25718,7 @@
                 <a:ea typeface="Trebuchet MS" pitchFamily="34" charset="-122"/>
                 <a:cs typeface="Trebuchet MS" pitchFamily="34" charset="-120"/>
               </a:rPr>
-              <a:t>re</a:t>
+              <a:t>print</a:t>
             </a:r>
             <a:endParaRPr lang="en-US" sz="1400" dirty="0"/>
           </a:p>
@@ -25889,7 +25823,7 @@
                 <a:ea typeface="Trebuchet MS" pitchFamily="34" charset="-122"/>
                 <a:cs typeface="Trebuchet MS" pitchFamily="34" charset="-120"/>
               </a:rPr>
-              <a:t>print</a:t>
+              <a:t>ing</a:t>
             </a:r>
             <a:endParaRPr lang="en-US" sz="1400" dirty="0"/>
           </a:p>
@@ -26313,7 +26247,7 @@
                 <a:ea typeface="Calibri" pitchFamily="34" charset="-122"/>
                 <a:cs typeface="Calibri" pitchFamily="34" charset="-120"/>
               </a:rPr>
-              <a:t>Word Labs  •  wordlabs.app  •  Root: 'print' = to press marks onto surface</a:t>
+              <a:t>Word Labs  •  wordlabs.app  •  Root: 'print' = mark made by pressing</a:t>
             </a:r>
             <a:endParaRPr lang="en-US" sz="800" dirty="0"/>
           </a:p>
@@ -26452,7 +26386,7 @@
                 <a:ea typeface="Trebuchet MS" pitchFamily="34" charset="-122"/>
                 <a:cs typeface="Trebuchet MS" pitchFamily="34" charset="-120"/>
               </a:rPr>
-              <a:t>reprint</a:t>
+              <a:t>printing</a:t>
             </a:r>
             <a:endParaRPr lang="en-US" sz="2800" dirty="0"/>
           </a:p>
@@ -26541,11 +26475,11 @@
             </a:avLst>
           </a:prstGeom>
           <a:solidFill>
-            <a:srgbClr val="DDD6FE"/>
+            <a:srgbClr val="CCFBF1"/>
           </a:solidFill>
           <a:ln w="19050">
             <a:solidFill>
-              <a:srgbClr val="7C3AED"/>
+              <a:srgbClr val="0D9488"/>
             </a:solidFill>
             <a:prstDash val="solid"/>
           </a:ln>
@@ -26585,13 +26519,13 @@
             <a:r>
               <a:rPr lang="en-US" sz="1300" b="1" dirty="0">
                 <a:solidFill>
-                  <a:srgbClr val="4C1D95"/>
+                  <a:srgbClr val="0F766E"/>
                 </a:solidFill>
                 <a:latin typeface="Trebuchet MS" pitchFamily="34" charset="0"/>
                 <a:ea typeface="Trebuchet MS" pitchFamily="34" charset="-122"/>
                 <a:cs typeface="Trebuchet MS" pitchFamily="34" charset="-120"/>
               </a:rPr>
-              <a:t>re</a:t>
+              <a:t>print</a:t>
             </a:r>
             <a:endParaRPr lang="en-US" sz="1300" dirty="0"/>
           </a:p>
@@ -26630,7 +26564,7 @@
                 <a:ea typeface="Calibri" pitchFamily="34" charset="-122"/>
                 <a:cs typeface="Calibri" pitchFamily="34" charset="-120"/>
               </a:rPr>
-              <a:t>again</a:t>
+              <a:t>mark made by pressing</a:t>
             </a:r>
             <a:endParaRPr lang="en-US" sz="850" dirty="0"/>
           </a:p>
@@ -26653,11 +26587,11 @@
             </a:avLst>
           </a:prstGeom>
           <a:solidFill>
-            <a:srgbClr val="CCFBF1"/>
+            <a:srgbClr val="FCE7F3"/>
           </a:solidFill>
           <a:ln w="19050">
             <a:solidFill>
-              <a:srgbClr val="0D9488"/>
+              <a:srgbClr val="DB2777"/>
             </a:solidFill>
             <a:prstDash val="solid"/>
           </a:ln>
@@ -26697,13 +26631,13 @@
             <a:r>
               <a:rPr lang="en-US" sz="1300" b="1" dirty="0">
                 <a:solidFill>
-                  <a:srgbClr val="0F766E"/>
+                  <a:srgbClr val="9D174D"/>
                 </a:solidFill>
                 <a:latin typeface="Trebuchet MS" pitchFamily="34" charset="0"/>
                 <a:ea typeface="Trebuchet MS" pitchFamily="34" charset="-122"/>
                 <a:cs typeface="Trebuchet MS" pitchFamily="34" charset="-120"/>
               </a:rPr>
-              <a:t>print</a:t>
+              <a:t>ing</a:t>
             </a:r>
             <a:endParaRPr lang="en-US" sz="1300" dirty="0"/>
           </a:p>
@@ -26742,7 +26676,7 @@
                 <a:ea typeface="Calibri" pitchFamily="34" charset="-122"/>
                 <a:cs typeface="Calibri" pitchFamily="34" charset="-120"/>
               </a:rPr>
-              <a:t>to press a mark onto a surface</a:t>
+              <a:t>action happening now</a:t>
             </a:r>
             <a:endParaRPr lang="en-US" sz="850" dirty="0"/>
           </a:p>
@@ -26901,7 +26835,7 @@
                 <a:ea typeface="Trebuchet MS" pitchFamily="34" charset="-122"/>
                 <a:cs typeface="Trebuchet MS" pitchFamily="34" charset="-120"/>
               </a:rPr>
-              <a:t>re</a:t>
+              <a:t>print</a:t>
             </a:r>
             <a:endParaRPr lang="en-US" sz="1400" dirty="0"/>
           </a:p>
@@ -27006,7 +26940,7 @@
                 <a:ea typeface="Trebuchet MS" pitchFamily="34" charset="-122"/>
                 <a:cs typeface="Trebuchet MS" pitchFamily="34" charset="-120"/>
               </a:rPr>
-              <a:t>print</a:t>
+              <a:t>ing</a:t>
             </a:r>
             <a:endParaRPr lang="en-US" sz="1400" dirty="0"/>
           </a:p>
@@ -27165,7 +27099,7 @@
                 <a:ea typeface="Trebuchet MS" pitchFamily="34" charset="-122"/>
                 <a:cs typeface="Trebuchet MS" pitchFamily="34" charset="-120"/>
               </a:rPr>
-              <a:t>r</a:t>
+              <a:t>p</a:t>
             </a:r>
             <a:endParaRPr lang="en-US" sz="900" dirty="0"/>
           </a:p>
@@ -27231,7 +27165,7 @@
                 <a:ea typeface="Trebuchet MS" pitchFamily="34" charset="-122"/>
                 <a:cs typeface="Trebuchet MS" pitchFamily="34" charset="-120"/>
               </a:rPr>
-              <a:t>e</a:t>
+              <a:t>r</a:t>
             </a:r>
             <a:endParaRPr lang="en-US" sz="900" dirty="0"/>
           </a:p>
@@ -27297,7 +27231,7 @@
                 <a:ea typeface="Trebuchet MS" pitchFamily="34" charset="-122"/>
                 <a:cs typeface="Trebuchet MS" pitchFamily="34" charset="-120"/>
               </a:rPr>
-              <a:t>p</a:t>
+              <a:t>i</a:t>
             </a:r>
             <a:endParaRPr lang="en-US" sz="900" dirty="0"/>
           </a:p>
@@ -27363,7 +27297,7 @@
                 <a:ea typeface="Trebuchet MS" pitchFamily="34" charset="-122"/>
                 <a:cs typeface="Trebuchet MS" pitchFamily="34" charset="-120"/>
               </a:rPr>
-              <a:t>r</a:t>
+              <a:t>n</a:t>
             </a:r>
             <a:endParaRPr lang="en-US" sz="900" dirty="0"/>
           </a:p>
@@ -27429,7 +27363,7 @@
                 <a:ea typeface="Trebuchet MS" pitchFamily="34" charset="-122"/>
                 <a:cs typeface="Trebuchet MS" pitchFamily="34" charset="-120"/>
               </a:rPr>
-              <a:t>i</a:t>
+              <a:t>t</a:t>
             </a:r>
             <a:endParaRPr lang="en-US" sz="900" dirty="0"/>
           </a:p>
@@ -27495,7 +27429,7 @@
                 <a:ea typeface="Trebuchet MS" pitchFamily="34" charset="-122"/>
                 <a:cs typeface="Trebuchet MS" pitchFamily="34" charset="-120"/>
               </a:rPr>
-              <a:t>n</a:t>
+              <a:t>i</a:t>
             </a:r>
             <a:endParaRPr lang="en-US" sz="900" dirty="0"/>
           </a:p>
@@ -27561,7 +27495,7 @@
                 <a:ea typeface="Trebuchet MS" pitchFamily="34" charset="-122"/>
                 <a:cs typeface="Trebuchet MS" pitchFamily="34" charset="-120"/>
               </a:rPr>
-              <a:t>t</a:t>
+              <a:t>ng</a:t>
             </a:r>
             <a:endParaRPr lang="en-US" sz="900" dirty="0"/>
           </a:p>
@@ -27853,7 +27787,7 @@
                 <a:ea typeface="Calibri" pitchFamily="34" charset="-122"/>
                 <a:cs typeface="Calibri" pitchFamily="34" charset="-120"/>
               </a:rPr>
-              <a:t>Word Labs  •  wordlabs.app  •  Root: 'print' = to press marks onto surface</a:t>
+              <a:t>Word Labs  •  wordlabs.app  •  Root: 'print' = mark made by pressing</a:t>
             </a:r>
             <a:endParaRPr lang="en-US" sz="800" dirty="0"/>
           </a:p>
@@ -27992,7 +27926,7 @@
                 <a:ea typeface="Trebuchet MS" pitchFamily="34" charset="-122"/>
                 <a:cs typeface="Trebuchet MS" pitchFamily="34" charset="-120"/>
               </a:rPr>
-              <a:t>blueprint</a:t>
+              <a:t>misprint</a:t>
             </a:r>
             <a:endParaRPr lang="en-US" sz="2800" dirty="0"/>
           </a:p>
@@ -28680,7 +28614,7 @@
                 <a:ea typeface="Calibri" pitchFamily="34" charset="-122"/>
                 <a:cs typeface="Calibri" pitchFamily="34" charset="-120"/>
               </a:rPr>
-              <a:t>Word Labs  •  wordlabs.app  •  Root: 'print' = to press marks onto surface</a:t>
+              <a:t>Word Labs  •  wordlabs.app  •  Root: 'print' = mark made by pressing</a:t>
             </a:r>
             <a:endParaRPr lang="en-US" sz="800" dirty="0"/>
           </a:p>
@@ -28819,7 +28753,7 @@
                 <a:ea typeface="Trebuchet MS" pitchFamily="34" charset="-122"/>
                 <a:cs typeface="Trebuchet MS" pitchFamily="34" charset="-120"/>
               </a:rPr>
-              <a:t>blueprint</a:t>
+              <a:t>misprint</a:t>
             </a:r>
             <a:endParaRPr lang="en-US" sz="2800" dirty="0"/>
           </a:p>
@@ -28958,7 +28892,7 @@
                 <a:ea typeface="Trebuchet MS" pitchFamily="34" charset="-122"/>
                 <a:cs typeface="Trebuchet MS" pitchFamily="34" charset="-120"/>
               </a:rPr>
-              <a:t>blue</a:t>
+              <a:t>mis</a:t>
             </a:r>
             <a:endParaRPr lang="en-US" sz="1300" dirty="0"/>
           </a:p>
@@ -28997,7 +28931,7 @@
                 <a:ea typeface="Calibri" pitchFamily="34" charset="-122"/>
                 <a:cs typeface="Calibri" pitchFamily="34" charset="-120"/>
               </a:rPr>
-              <a:t>the colour blue</a:t>
+              <a:t>wrongly or badly</a:t>
             </a:r>
             <a:endParaRPr lang="en-US" sz="850" dirty="0"/>
           </a:p>
@@ -29109,7 +29043,7 @@
                 <a:ea typeface="Calibri" pitchFamily="34" charset="-122"/>
                 <a:cs typeface="Calibri" pitchFamily="34" charset="-120"/>
               </a:rPr>
-              <a:t>to press a mark onto a surface</a:t>
+              <a:t>mark made by pressing</a:t>
             </a:r>
             <a:endParaRPr lang="en-US" sz="850" dirty="0"/>
           </a:p>
@@ -29665,7 +29599,7 @@
                 <a:ea typeface="Calibri" pitchFamily="34" charset="-122"/>
                 <a:cs typeface="Calibri" pitchFamily="34" charset="-120"/>
               </a:rPr>
-              <a:t>Word Labs  •  wordlabs.app  •  Root: 'print' = to press marks onto surface</a:t>
+              <a:t>Word Labs  •  wordlabs.app  •  Root: 'print' = mark made by pressing</a:t>
             </a:r>
             <a:endParaRPr lang="en-US" sz="800" dirty="0"/>
           </a:p>
@@ -29804,7 +29738,7 @@
                 <a:ea typeface="Trebuchet MS" pitchFamily="34" charset="-122"/>
                 <a:cs typeface="Trebuchet MS" pitchFamily="34" charset="-120"/>
               </a:rPr>
-              <a:t>blueprint</a:t>
+              <a:t>misprint</a:t>
             </a:r>
             <a:endParaRPr lang="en-US" sz="2800" dirty="0"/>
           </a:p>
@@ -29943,7 +29877,7 @@
                 <a:ea typeface="Trebuchet MS" pitchFamily="34" charset="-122"/>
                 <a:cs typeface="Trebuchet MS" pitchFamily="34" charset="-120"/>
               </a:rPr>
-              <a:t>blue</a:t>
+              <a:t>mis</a:t>
             </a:r>
             <a:endParaRPr lang="en-US" sz="1300" dirty="0"/>
           </a:p>
@@ -29982,7 +29916,7 @@
                 <a:ea typeface="Calibri" pitchFamily="34" charset="-122"/>
                 <a:cs typeface="Calibri" pitchFamily="34" charset="-120"/>
               </a:rPr>
-              <a:t>the colour blue</a:t>
+              <a:t>wrongly or badly</a:t>
             </a:r>
             <a:endParaRPr lang="en-US" sz="850" dirty="0"/>
           </a:p>
@@ -30094,7 +30028,7 @@
                 <a:ea typeface="Calibri" pitchFamily="34" charset="-122"/>
                 <a:cs typeface="Calibri" pitchFamily="34" charset="-120"/>
               </a:rPr>
-              <a:t>to press a mark onto a surface</a:t>
+              <a:t>mark made by pressing</a:t>
             </a:r>
             <a:endParaRPr lang="en-US" sz="850" dirty="0"/>
           </a:p>
@@ -30253,7 +30187,7 @@
                 <a:ea typeface="Trebuchet MS" pitchFamily="34" charset="-122"/>
                 <a:cs typeface="Trebuchet MS" pitchFamily="34" charset="-120"/>
               </a:rPr>
-              <a:t>blue</a:t>
+              <a:t>mis</a:t>
             </a:r>
             <a:endParaRPr lang="en-US" sz="1400" dirty="0"/>
           </a:p>
@@ -30782,7 +30716,7 @@
                 <a:ea typeface="Calibri" pitchFamily="34" charset="-122"/>
                 <a:cs typeface="Calibri" pitchFamily="34" charset="-120"/>
               </a:rPr>
-              <a:t>Word Labs  •  wordlabs.app  •  Root: 'print' = to press marks onto surface</a:t>
+              <a:t>Word Labs  •  wordlabs.app  •  Root: 'print' = mark made by pressing</a:t>
             </a:r>
             <a:endParaRPr lang="en-US" sz="800" dirty="0"/>
           </a:p>
@@ -30921,7 +30855,7 @@
                 <a:ea typeface="Trebuchet MS" pitchFamily="34" charset="-122"/>
                 <a:cs typeface="Trebuchet MS" pitchFamily="34" charset="-120"/>
               </a:rPr>
-              <a:t>blueprint</a:t>
+              <a:t>misprint</a:t>
             </a:r>
             <a:endParaRPr lang="en-US" sz="2800" dirty="0"/>
           </a:p>
@@ -31060,7 +30994,7 @@
                 <a:ea typeface="Trebuchet MS" pitchFamily="34" charset="-122"/>
                 <a:cs typeface="Trebuchet MS" pitchFamily="34" charset="-120"/>
               </a:rPr>
-              <a:t>blue</a:t>
+              <a:t>mis</a:t>
             </a:r>
             <a:endParaRPr lang="en-US" sz="1300" dirty="0"/>
           </a:p>
@@ -31099,7 +31033,7 @@
                 <a:ea typeface="Calibri" pitchFamily="34" charset="-122"/>
                 <a:cs typeface="Calibri" pitchFamily="34" charset="-120"/>
               </a:rPr>
-              <a:t>the colour blue</a:t>
+              <a:t>wrongly or badly</a:t>
             </a:r>
             <a:endParaRPr lang="en-US" sz="850" dirty="0"/>
           </a:p>
@@ -31211,7 +31145,7 @@
                 <a:ea typeface="Calibri" pitchFamily="34" charset="-122"/>
                 <a:cs typeface="Calibri" pitchFamily="34" charset="-120"/>
               </a:rPr>
-              <a:t>to press a mark onto a surface</a:t>
+              <a:t>mark made by pressing</a:t>
             </a:r>
             <a:endParaRPr lang="en-US" sz="850" dirty="0"/>
           </a:p>
@@ -31370,7 +31304,7 @@
                 <a:ea typeface="Trebuchet MS" pitchFamily="34" charset="-122"/>
                 <a:cs typeface="Trebuchet MS" pitchFamily="34" charset="-120"/>
               </a:rPr>
-              <a:t>blue</a:t>
+              <a:t>mis</a:t>
             </a:r>
             <a:endParaRPr lang="en-US" sz="1400" dirty="0"/>
           </a:p>
@@ -31634,7 +31568,7 @@
                 <a:ea typeface="Trebuchet MS" pitchFamily="34" charset="-122"/>
                 <a:cs typeface="Trebuchet MS" pitchFamily="34" charset="-120"/>
               </a:rPr>
-              <a:t>b</a:t>
+              <a:t>m</a:t>
             </a:r>
             <a:endParaRPr lang="en-US" sz="900" dirty="0"/>
           </a:p>
@@ -31700,7 +31634,7 @@
                 <a:ea typeface="Trebuchet MS" pitchFamily="34" charset="-122"/>
                 <a:cs typeface="Trebuchet MS" pitchFamily="34" charset="-120"/>
               </a:rPr>
-              <a:t>l</a:t>
+              <a:t>i</a:t>
             </a:r>
             <a:endParaRPr lang="en-US" sz="900" dirty="0"/>
           </a:p>
@@ -31766,7 +31700,7 @@
                 <a:ea typeface="Trebuchet MS" pitchFamily="34" charset="-122"/>
                 <a:cs typeface="Trebuchet MS" pitchFamily="34" charset="-120"/>
               </a:rPr>
-              <a:t>ue</a:t>
+              <a:t>s</a:t>
             </a:r>
             <a:endParaRPr lang="en-US" sz="900" dirty="0"/>
           </a:p>
@@ -32388,7 +32322,7 @@
                 <a:ea typeface="Calibri" pitchFamily="34" charset="-122"/>
                 <a:cs typeface="Calibri" pitchFamily="34" charset="-120"/>
               </a:rPr>
-              <a:t>Word Labs  •  wordlabs.app  •  Root: 'print' = to press marks onto surface</a:t>
+              <a:t>Word Labs  •  wordlabs.app  •  Root: 'print' = mark made by pressing</a:t>
             </a:r>
             <a:endParaRPr lang="en-US" sz="800" dirty="0"/>
           </a:p>
@@ -33557,7 +33491,7 @@
                 <a:ea typeface="Calibri" pitchFamily="34" charset="-122"/>
                 <a:cs typeface="Calibri" pitchFamily="34" charset="-120"/>
               </a:rPr>
-              <a:t>Word Labs  •  wordlabs.app  •  Root: 'print' = to press marks onto surface</a:t>
+              <a:t>Word Labs  •  wordlabs.app  •  Root: 'print' = mark made by pressing</a:t>
             </a:r>
             <a:endParaRPr lang="en-US" sz="800" dirty="0"/>
           </a:p>
@@ -34203,7 +34137,7 @@
                 <a:ea typeface="Trebuchet MS" pitchFamily="34" charset="-122"/>
                 <a:cs typeface="Trebuchet MS" pitchFamily="34" charset="-120"/>
               </a:rPr>
-              <a:t>over-</a:t>
+              <a:t>im-</a:t>
             </a:r>
             <a:endParaRPr lang="en-US" sz="1300" dirty="0"/>
           </a:p>
@@ -34509,7 +34443,7 @@
                 <a:ea typeface="Trebuchet MS" pitchFamily="34" charset="-122"/>
                 <a:cs typeface="Trebuchet MS" pitchFamily="34" charset="-120"/>
               </a:rPr>
-              <a:t>finger-</a:t>
+              <a:t>foot-</a:t>
             </a:r>
             <a:endParaRPr lang="en-US" sz="1300" dirty="0"/>
           </a:p>
@@ -34835,7 +34769,7 @@
                 <a:ea typeface="Trebuchet MS" pitchFamily="34" charset="-122"/>
                 <a:cs typeface="Trebuchet MS" pitchFamily="34" charset="-120"/>
               </a:rPr>
-              <a:t>blueprint</a:t>
+              <a:t>misprint</a:t>
             </a:r>
             <a:endParaRPr lang="en-US" sz="1200" dirty="0"/>
           </a:p>
@@ -34901,7 +34835,7 @@
                 <a:ea typeface="Trebuchet MS" pitchFamily="34" charset="-122"/>
                 <a:cs typeface="Trebuchet MS" pitchFamily="34" charset="-120"/>
               </a:rPr>
-              <a:t>printing</a:t>
+              <a:t>blueprint</a:t>
             </a:r>
             <a:endParaRPr lang="en-US" sz="1200" dirty="0"/>
           </a:p>
@@ -34967,7 +34901,7 @@
                 <a:ea typeface="Trebuchet MS" pitchFamily="34" charset="-122"/>
                 <a:cs typeface="Trebuchet MS" pitchFamily="34" charset="-120"/>
               </a:rPr>
-              <a:t>printer</a:t>
+              <a:t>footprint</a:t>
             </a:r>
             <a:endParaRPr lang="en-US" sz="1200" dirty="0"/>
           </a:p>
@@ -35033,7 +34967,7 @@
                 <a:ea typeface="Trebuchet MS" pitchFamily="34" charset="-122"/>
                 <a:cs typeface="Trebuchet MS" pitchFamily="34" charset="-120"/>
               </a:rPr>
-              <a:t>printout</a:t>
+              <a:t>printer</a:t>
             </a:r>
             <a:endParaRPr lang="en-US" sz="1200" dirty="0"/>
           </a:p>
@@ -35099,7 +35033,7 @@
                 <a:ea typeface="Trebuchet MS" pitchFamily="34" charset="-122"/>
                 <a:cs typeface="Trebuchet MS" pitchFamily="34" charset="-120"/>
               </a:rPr>
-              <a:t>overprint</a:t>
+              <a:t>printing</a:t>
             </a:r>
             <a:endParaRPr lang="en-US" sz="1200" dirty="0"/>
           </a:p>
@@ -35165,7 +35099,7 @@
                 <a:ea typeface="Trebuchet MS" pitchFamily="34" charset="-122"/>
                 <a:cs typeface="Trebuchet MS" pitchFamily="34" charset="-120"/>
               </a:rPr>
-              <a:t>misprint</a:t>
+              <a:t>imprint</a:t>
             </a:r>
             <a:endParaRPr lang="en-US" sz="1200" dirty="0"/>
           </a:p>
@@ -35457,7 +35391,7 @@
                 <a:ea typeface="Calibri" pitchFamily="34" charset="-122"/>
                 <a:cs typeface="Calibri" pitchFamily="34" charset="-120"/>
               </a:rPr>
-              <a:t>Word Labs  •  wordlabs.app  •  Root: 'print' = to press marks onto surface</a:t>
+              <a:t>Word Labs  •  wordlabs.app  •  Root: 'print' = mark made by pressing</a:t>
             </a:r>
             <a:endParaRPr lang="en-US" sz="800" dirty="0"/>
           </a:p>
@@ -35621,7 +35555,7 @@
                 <a:ea typeface="Calibri" pitchFamily="34" charset="-122"/>
                 <a:cs typeface="Calibri" pitchFamily="34" charset="-120"/>
               </a:rPr>
-              <a:t>The core part of a word carrying its basic meaning. For example, 'print' means 'to press marks onto surface'.</a:t>
+              <a:t>The core part of a word carrying its basic meaning. For example, 'print' means 'mark made by pressing'.</a:t>
             </a:r>
             <a:endParaRPr lang="en-US" sz="1350" dirty="0"/>
           </a:p>
@@ -36241,7 +36175,7 @@
                 <a:ea typeface="Calibri" pitchFamily="34" charset="-122"/>
                 <a:cs typeface="Calibri" pitchFamily="34" charset="-120"/>
               </a:rPr>
-              <a:t>Word Labs  •  wordlabs.app  •  Root: 'print' = to press marks onto surface</a:t>
+              <a:t>Word Labs  •  wordlabs.app  •  Root: 'print' = mark made by pressing</a:t>
             </a:r>
             <a:endParaRPr lang="en-US" sz="800" dirty="0"/>
           </a:p>
@@ -36353,7 +36287,7 @@
                 <a:ea typeface="Calibri" pitchFamily="34" charset="-122"/>
                 <a:cs typeface="Calibri" pitchFamily="34" charset="-120"/>
               </a:rPr>
-              <a:t>1.  A fingerprint is the unique pattern of ridges left by your finger on a surface.</a:t>
+              <a:t>1.  The word 'printer' contains no suffix added to the root 'print'.</a:t>
             </a:r>
             <a:endParaRPr lang="en-US" sz="1300" dirty="0"/>
           </a:p>
@@ -36376,11 +36310,11 @@
             </a:avLst>
           </a:prstGeom>
           <a:solidFill>
-            <a:srgbClr val="DCFCE7"/>
-          </a:solidFill>
-          <a:ln w="12700">
-            <a:solidFill>
-              <a:srgbClr val="16A34A"/>
+            <a:srgbClr val="FEE2E2"/>
+          </a:solidFill>
+          <a:ln w="12700">
+            <a:solidFill>
+              <a:srgbClr val="DC2626"/>
             </a:solidFill>
             <a:prstDash val="solid"/>
           </a:ln>
@@ -36413,13 +36347,13 @@
             <a:r>
               <a:rPr lang="en-US" sz="1100" b="1" dirty="0">
                 <a:solidFill>
-                  <a:srgbClr val="16A34A"/>
+                  <a:srgbClr val="DC2626"/>
                 </a:solidFill>
                 <a:latin typeface="Trebuchet MS" pitchFamily="34" charset="0"/>
                 <a:ea typeface="Trebuchet MS" pitchFamily="34" charset="-122"/>
                 <a:cs typeface="Trebuchet MS" pitchFamily="34" charset="-120"/>
               </a:rPr>
-              <a:t>TRUE</a:t>
+              <a:t>FALSE</a:t>
             </a:r>
             <a:endParaRPr lang="en-US" sz="1100" dirty="0"/>
           </a:p>
@@ -36492,7 +36426,7 @@
                 <a:ea typeface="Calibri" pitchFamily="34" charset="-122"/>
                 <a:cs typeface="Calibri" pitchFamily="34" charset="-120"/>
               </a:rPr>
-              <a:t>2.  The word 'misprint' means to print something perfectly without any errors.</a:t>
+              <a:t>2.  The root 'print' comes from an ancient Greek word.</a:t>
             </a:r>
             <a:endParaRPr lang="en-US" sz="1300" dirty="0"/>
           </a:p>
@@ -36631,7 +36565,7 @@
                 <a:ea typeface="Calibri" pitchFamily="34" charset="-122"/>
                 <a:cs typeface="Calibri" pitchFamily="34" charset="-120"/>
               </a:rPr>
-              <a:t>3.  A blueprint is a type of detailed plan, often used for designing buildings.</a:t>
+              <a:t>3.  A misprint is an error found in something that has been printed.</a:t>
             </a:r>
             <a:endParaRPr lang="en-US" sz="1300" dirty="0"/>
           </a:p>
@@ -36770,7 +36704,7 @@
                 <a:ea typeface="Calibri" pitchFamily="34" charset="-122"/>
                 <a:cs typeface="Calibri" pitchFamily="34" charset="-120"/>
               </a:rPr>
-              <a:t>4.  A printout is a sheet of paper with information printed on it from a computer.</a:t>
+              <a:t>4.  A fingerprint is the unique mark left by pressing your fingertip onto a surface.</a:t>
             </a:r>
             <a:endParaRPr lang="en-US" sz="1300" dirty="0"/>
           </a:p>
@@ -36909,7 +36843,7 @@
                 <a:ea typeface="Calibri" pitchFamily="34" charset="-122"/>
                 <a:cs typeface="Calibri" pitchFamily="34" charset="-120"/>
               </a:rPr>
-              <a:t>5.  The root 'print' comes from a Greek word meaning 'to write'.</a:t>
+              <a:t>5.  A blueprint is a type of detailed plan or design.</a:t>
             </a:r>
             <a:endParaRPr lang="en-US" sz="1300" dirty="0"/>
           </a:p>
@@ -36932,11 +36866,11 @@
             </a:avLst>
           </a:prstGeom>
           <a:solidFill>
-            <a:srgbClr val="FEE2E2"/>
-          </a:solidFill>
-          <a:ln w="12700">
-            <a:solidFill>
-              <a:srgbClr val="DC2626"/>
+            <a:srgbClr val="DCFCE7"/>
+          </a:solidFill>
+          <a:ln w="12700">
+            <a:solidFill>
+              <a:srgbClr val="16A34A"/>
             </a:solidFill>
             <a:prstDash val="solid"/>
           </a:ln>
@@ -36969,13 +36903,13 @@
             <a:r>
               <a:rPr lang="en-US" sz="1100" b="1" dirty="0">
                 <a:solidFill>
-                  <a:srgbClr val="DC2626"/>
+                  <a:srgbClr val="16A34A"/>
                 </a:solidFill>
                 <a:latin typeface="Trebuchet MS" pitchFamily="34" charset="0"/>
                 <a:ea typeface="Trebuchet MS" pitchFamily="34" charset="-122"/>
                 <a:cs typeface="Trebuchet MS" pitchFamily="34" charset="-120"/>
               </a:rPr>
-              <a:t>FALSE</a:t>
+              <a:t>TRUE</a:t>
             </a:r>
             <a:endParaRPr lang="en-US" sz="1100" dirty="0"/>
           </a:p>
@@ -37267,7 +37201,7 @@
                 <a:ea typeface="Calibri" pitchFamily="34" charset="-122"/>
                 <a:cs typeface="Calibri" pitchFamily="34" charset="-120"/>
               </a:rPr>
-              <a:t>Word Labs  •  wordlabs.app  •  Root: 'print' = to press marks onto surface</a:t>
+              <a:t>Word Labs  •  wordlabs.app  •  Root: 'print' = mark made by pressing</a:t>
             </a:r>
             <a:endParaRPr lang="en-US" sz="800" dirty="0"/>
           </a:p>
@@ -37404,7 +37338,7 @@
                 <a:ea typeface="Trebuchet MS" pitchFamily="34" charset="-122"/>
                 <a:cs typeface="Trebuchet MS" pitchFamily="34" charset="-120"/>
               </a:rPr>
-              <a:t>to press marks onto surface</a:t>
+              <a:t>mark made by pressing</a:t>
             </a:r>
             <a:endParaRPr lang="en-US" sz="2000" dirty="0"/>
           </a:p>
@@ -37680,7 +37614,7 @@
                 <a:ea typeface="Trebuchet MS" pitchFamily="34" charset="-122"/>
                 <a:cs typeface="Trebuchet MS" pitchFamily="34" charset="-120"/>
               </a:rPr>
-              <a:t>blueprint</a:t>
+              <a:t>misprint</a:t>
             </a:r>
             <a:endParaRPr lang="en-US" sz="1300" dirty="0"/>
           </a:p>
@@ -37746,7 +37680,7 @@
                 <a:ea typeface="Trebuchet MS" pitchFamily="34" charset="-122"/>
                 <a:cs typeface="Trebuchet MS" pitchFamily="34" charset="-120"/>
               </a:rPr>
-              <a:t>printing</a:t>
+              <a:t>blueprint</a:t>
             </a:r>
             <a:endParaRPr lang="en-US" sz="1300" dirty="0"/>
           </a:p>
@@ -37812,7 +37746,7 @@
                 <a:ea typeface="Trebuchet MS" pitchFamily="34" charset="-122"/>
                 <a:cs typeface="Trebuchet MS" pitchFamily="34" charset="-120"/>
               </a:rPr>
-              <a:t>printer</a:t>
+              <a:t>footprint</a:t>
             </a:r>
             <a:endParaRPr lang="en-US" sz="1300" dirty="0"/>
           </a:p>
@@ -37878,7 +37812,7 @@
                 <a:ea typeface="Trebuchet MS" pitchFamily="34" charset="-122"/>
                 <a:cs typeface="Trebuchet MS" pitchFamily="34" charset="-120"/>
               </a:rPr>
-              <a:t>printout</a:t>
+              <a:t>printer</a:t>
             </a:r>
             <a:endParaRPr lang="en-US" sz="1300" dirty="0"/>
           </a:p>
@@ -37944,7 +37878,7 @@
                 <a:ea typeface="Trebuchet MS" pitchFamily="34" charset="-122"/>
                 <a:cs typeface="Trebuchet MS" pitchFamily="34" charset="-120"/>
               </a:rPr>
-              <a:t>overprint</a:t>
+              <a:t>printing</a:t>
             </a:r>
             <a:endParaRPr lang="en-US" sz="1300" dirty="0"/>
           </a:p>
@@ -38236,7 +38170,7 @@
                 <a:ea typeface="Calibri" pitchFamily="34" charset="-122"/>
                 <a:cs typeface="Calibri" pitchFamily="34" charset="-120"/>
               </a:rPr>
-              <a:t>Word Labs  •  wordlabs.app  •  Root: 'print' = to press marks onto surface</a:t>
+              <a:t>Word Labs  •  wordlabs.app  •  Root: 'print' = mark made by pressing</a:t>
             </a:r>
             <a:endParaRPr lang="en-US" sz="800" dirty="0"/>
           </a:p>
@@ -38882,7 +38816,7 @@
                 <a:ea typeface="Trebuchet MS" pitchFamily="34" charset="-122"/>
                 <a:cs typeface="Trebuchet MS" pitchFamily="34" charset="-120"/>
               </a:rPr>
-              <a:t>over-</a:t>
+              <a:t>im-</a:t>
             </a:r>
             <a:endParaRPr lang="en-US" sz="1300" dirty="0"/>
           </a:p>
@@ -39188,7 +39122,7 @@
                 <a:ea typeface="Trebuchet MS" pitchFamily="34" charset="-122"/>
                 <a:cs typeface="Trebuchet MS" pitchFamily="34" charset="-120"/>
               </a:rPr>
-              <a:t>finger-</a:t>
+              <a:t>foot-</a:t>
             </a:r>
             <a:endParaRPr lang="en-US" sz="1300" dirty="0"/>
           </a:p>
@@ -40010,7 +39944,7 @@
                 <a:ea typeface="Calibri" pitchFamily="34" charset="-122"/>
                 <a:cs typeface="Calibri" pitchFamily="34" charset="-120"/>
               </a:rPr>
-              <a:t>Word Labs  •  wordlabs.app  •  Root: 'print' = to press marks onto surface</a:t>
+              <a:t>Word Labs  •  wordlabs.app  •  Root: 'print' = mark made by pressing</a:t>
             </a:r>
             <a:endParaRPr lang="en-US" sz="800" dirty="0"/>
           </a:p>
@@ -40188,7 +40122,7 @@
                 <a:ea typeface="Calibri" pitchFamily="34" charset="-122"/>
                 <a:cs typeface="Calibri" pitchFamily="34" charset="-120"/>
               </a:rPr>
-              <a:t>A detailed plan or drawing, often used for buildings or inventions.</a:t>
+              <a:t>A mistake in something that has been printed, like a spelling error in a book.</a:t>
             </a:r>
             <a:endParaRPr lang="en-US" sz="1200" dirty="0"/>
           </a:p>
@@ -40327,7 +40261,7 @@
                 <a:ea typeface="Calibri" pitchFamily="34" charset="-122"/>
                 <a:cs typeface="Calibri" pitchFamily="34" charset="-120"/>
               </a:rPr>
-              <a:t>A machine connected to a computer that puts words and pictures onto paper.</a:t>
+              <a:t>The mark left behind by a foot stepping on a surface.</a:t>
             </a:r>
             <a:endParaRPr lang="en-US" sz="1200" dirty="0"/>
           </a:p>
@@ -40400,7 +40334,7 @@
                 <a:ea typeface="Trebuchet MS" pitchFamily="34" charset="-122"/>
                 <a:cs typeface="Trebuchet MS" pitchFamily="34" charset="-120"/>
               </a:rPr>
-              <a:t>blueprint</a:t>
+              <a:t>misprint</a:t>
             </a:r>
             <a:endParaRPr lang="en-US" sz="1200" dirty="0"/>
           </a:p>
@@ -40466,7 +40400,7 @@
                 <a:ea typeface="Calibri" pitchFamily="34" charset="-122"/>
                 <a:cs typeface="Calibri" pitchFamily="34" charset="-120"/>
               </a:rPr>
-              <a:t>To print something again, usually because the first version had mistakes or ran out.</a:t>
+              <a:t>To print something again, like making extra copies of a book.</a:t>
             </a:r>
             <a:endParaRPr lang="en-US" sz="1200" dirty="0"/>
           </a:p>
@@ -40539,7 +40473,7 @@
                 <a:ea typeface="Trebuchet MS" pitchFamily="34" charset="-122"/>
                 <a:cs typeface="Trebuchet MS" pitchFamily="34" charset="-120"/>
               </a:rPr>
-              <a:t>printing</a:t>
+              <a:t>blueprint</a:t>
             </a:r>
             <a:endParaRPr lang="en-US" sz="1200" dirty="0"/>
           </a:p>
@@ -40605,7 +40539,7 @@
                 <a:ea typeface="Calibri" pitchFamily="34" charset="-122"/>
                 <a:cs typeface="Calibri" pitchFamily="34" charset="-120"/>
               </a:rPr>
-              <a:t>A piece of paper with information on it that has come out of a printer.</a:t>
+              <a:t>A machine that puts words and pictures onto paper.</a:t>
             </a:r>
             <a:endParaRPr lang="en-US" sz="1200" dirty="0"/>
           </a:p>
@@ -40678,7 +40612,7 @@
                 <a:ea typeface="Trebuchet MS" pitchFamily="34" charset="-122"/>
                 <a:cs typeface="Trebuchet MS" pitchFamily="34" charset="-120"/>
               </a:rPr>
-              <a:t>printer</a:t>
+              <a:t>footprint</a:t>
             </a:r>
             <a:endParaRPr lang="en-US" sz="1200" dirty="0"/>
           </a:p>
@@ -40744,7 +40678,7 @@
                 <a:ea typeface="Calibri" pitchFamily="34" charset="-122"/>
                 <a:cs typeface="Calibri" pitchFamily="34" charset="-120"/>
               </a:rPr>
-              <a:t>To print extra words or images on top of something that has already been printed.</a:t>
+              <a:t>The process of putting words or images onto paper using a machine or press.</a:t>
             </a:r>
             <a:endParaRPr lang="en-US" sz="1200" dirty="0"/>
           </a:p>
@@ -40817,7 +40751,7 @@
                 <a:ea typeface="Trebuchet MS" pitchFamily="34" charset="-122"/>
                 <a:cs typeface="Trebuchet MS" pitchFamily="34" charset="-120"/>
               </a:rPr>
-              <a:t>printout</a:t>
+              <a:t>printer</a:t>
             </a:r>
             <a:endParaRPr lang="en-US" sz="1200" dirty="0"/>
           </a:p>
@@ -40883,7 +40817,7 @@
                 <a:ea typeface="Calibri" pitchFamily="34" charset="-122"/>
                 <a:cs typeface="Calibri" pitchFamily="34" charset="-120"/>
               </a:rPr>
-              <a:t>The process of pressing ink onto paper or another surface to make words or pictures.</a:t>
+              <a:t>A detailed plan or drawing, often used to show how a building will be made.</a:t>
             </a:r>
             <a:endParaRPr lang="en-US" sz="1200" dirty="0"/>
           </a:p>
@@ -40956,7 +40890,7 @@
                 <a:ea typeface="Trebuchet MS" pitchFamily="34" charset="-122"/>
                 <a:cs typeface="Trebuchet MS" pitchFamily="34" charset="-120"/>
               </a:rPr>
-              <a:t>overprint</a:t>
+              <a:t>printing</a:t>
             </a:r>
             <a:endParaRPr lang="en-US" sz="1200" dirty="0"/>
           </a:p>
@@ -41022,7 +40956,7 @@
                 <a:ea typeface="Calibri" pitchFamily="34" charset="-122"/>
                 <a:cs typeface="Calibri" pitchFamily="34" charset="-120"/>
               </a:rPr>
-              <a:t>The unique mark left by the ridges on the tip of your finger when you touch something.</a:t>
+              <a:t>The unique mark left by the tip of your finger when you touch something.</a:t>
             </a:r>
             <a:endParaRPr lang="en-US" sz="1200" dirty="0"/>
           </a:p>
@@ -41314,7 +41248,7 @@
                 <a:ea typeface="Calibri" pitchFamily="34" charset="-122"/>
                 <a:cs typeface="Calibri" pitchFamily="34" charset="-120"/>
               </a:rPr>
-              <a:t>Word Labs  •  wordlabs.app  •  Root: 'print' = to press marks onto surface</a:t>
+              <a:t>Word Labs  •  wordlabs.app  •  Root: 'print' = mark made by pressing</a:t>
             </a:r>
             <a:endParaRPr lang="en-US" sz="800" dirty="0"/>
           </a:p>
@@ -41517,7 +41451,7 @@
                 <a:ea typeface="Calibri" pitchFamily="34" charset="-122"/>
                 <a:cs typeface="Calibri" pitchFamily="34" charset="-120"/>
               </a:rPr>
-              <a:t>The teacher asked us to collect our printout from the printer at the front of the classroom.</a:t>
+              <a:t>The journalist noticed a misprint on the front page of the newspaper, so the editor ordered a reprint.</a:t>
             </a:r>
             <a:endParaRPr lang="en-US" sz="1500" dirty="0"/>
           </a:p>
@@ -41681,7 +41615,7 @@
                 <a:ea typeface="Calibri" pitchFamily="34" charset="-122"/>
                 <a:cs typeface="Calibri" pitchFamily="34" charset="-120"/>
               </a:rPr>
-              <a:t>Detectives at the crime scene found a clear fingerprint on the window that helped them solve the mystery.</a:t>
+              <a:t>Scientists found a clear footprint in the mud near the riverbank and used it as evidence.</a:t>
             </a:r>
             <a:endParaRPr lang="en-US" sz="1500" dirty="0"/>
           </a:p>
@@ -41845,7 +41779,7 @@
                 <a:ea typeface="Calibri" pitchFamily="34" charset="-122"/>
                 <a:cs typeface="Calibri" pitchFamily="34" charset="-120"/>
               </a:rPr>
-              <a:t>The architect unrolled the blueprint across the table so everyone could see the plans for the new school library.</a:t>
+              <a:t>The architect showed us the blueprint for the new school library, which looked very exciting.</a:t>
             </a:r>
             <a:endParaRPr lang="en-US" sz="1500" dirty="0"/>
           </a:p>
